--- a/DataWarrior_Tutorial.pptx
+++ b/DataWarrior_Tutorial.pptx
@@ -13235,7 +13235,7 @@
               </a:defRPr>
             </a:pPr>
             <a:r>
-              <a:t>• Fragment-based scoring (Muegge 방식)</a:t>
+              <a:t>• Fragment-based scoring (자체 fragment-based scoring)</a:t>
             </a:r>
           </a:p>
         </p:txBody>
@@ -16091,7 +16091,7 @@
               </a:defRPr>
             </a:pPr>
             <a:r>
-              <a:t>   Descriptor: SkelSpheres (3D-aware)</a:t>
+              <a:t>   Descriptor: SkelSpheres (topological, 2D)</a:t>
             </a:r>
           </a:p>
           <a:p>
@@ -16502,7 +16502,7 @@
               </a:defRPr>
             </a:pPr>
             <a:r>
-              <a:t>Kinase Panel 결과 분석</a:t>
+              <a:t>실습 7: Kinase Panel 결과 분석</a:t>
             </a:r>
           </a:p>
         </p:txBody>
@@ -16903,7 +16903,7 @@
               </a:defRPr>
             </a:pPr>
             <a:r>
-              <a:t>실습 5 (계속): R-Group Decomposition 상세</a:t>
+              <a:t>실습 5b: R-Group Decomposition 상세</a:t>
             </a:r>
           </a:p>
         </p:txBody>
